--- a/skill-forks/sebastian-203-ja/deck.pptx
+++ b/skill-forks/sebastian-203-ja/deck.pptx
@@ -4072,7 +4072,7 @@
                 <a:solidFill>
                   <a:srgbClr val="0B3A5B"/>
                 </a:solidFill>
-                <a:latin typeface="Noto Sans CJK JP"/>
+                <a:latin typeface="BIZ UDPGothic"/>
               </a:rPr>
               <a:t>静けさを選べる</a:t>
             </a:r>
@@ -4083,7 +4083,7 @@
                 <a:solidFill>
                   <a:srgbClr val="0B3A5B"/>
                 </a:solidFill>
-                <a:latin typeface="Noto Sans CJK JP"/>
+                <a:latin typeface="BIZ UDPGothic"/>
               </a:rPr>
               <a:t>図書館</a:t>
             </a:r>
@@ -4117,7 +4117,7 @@
                 <a:solidFill>
                   <a:srgbClr val="202A33"/>
                 </a:solidFill>
-                <a:latin typeface="Noto Sans CJK JP"/>
+                <a:latin typeface="BIZ UDPGothic"/>
               </a:rPr>
               <a:t>図書館の音環境を、利用者が選べるか</a:t>
             </a:r>
@@ -4151,7 +4151,7 @@
                 <a:solidFill>
                   <a:srgbClr val="5D6B78"/>
                 </a:solidFill>
-                <a:latin typeface="Noto Sans CJK JP"/>
+                <a:latin typeface="BIZ UDPGothic"/>
               </a:rPr>
               <a:t>ゾーニングと案内表示の研究計画</a:t>
             </a:r>
@@ -4162,7 +4162,7 @@
                 <a:solidFill>
                   <a:srgbClr val="5D6B78"/>
                 </a:solidFill>
-                <a:latin typeface="Noto Sans CJK JP"/>
+                <a:latin typeface="BIZ UDPGothic"/>
               </a:rPr>
               <a:t>架空の提案・未実施</a:t>
             </a:r>
@@ -4231,7 +4231,7 @@
                 <a:solidFill>
                   <a:srgbClr val="0B3A5B"/>
                 </a:solidFill>
-                <a:latin typeface="Noto Sans CJK JP"/>
+                <a:latin typeface="BIZ UDPGothic"/>
               </a:rPr>
               <a:t>静かな閲覧　／　小声の相談　／　会話のある活動</a:t>
             </a:r>
@@ -4265,7 +4265,7 @@
                 <a:solidFill>
                   <a:srgbClr val="0B3A5B"/>
                 </a:solidFill>
-                <a:latin typeface="Noto Sans CJK JP"/>
+                <a:latin typeface="BIZ UDPGothic"/>
               </a:rPr>
               <a:t>01</a:t>
             </a:r>
@@ -4403,7 +4403,7 @@
                 <a:solidFill>
                   <a:srgbClr val="5D6B78"/>
                 </a:solidFill>
-                <a:latin typeface="Noto Sans CJK JP"/>
+                <a:latin typeface="BIZ UDPGothic"/>
               </a:rPr>
               <a:t>静けさを選べる図書館</a:t>
             </a:r>
@@ -4437,7 +4437,7 @@
                 <a:solidFill>
                   <a:srgbClr val="5D6B78"/>
                 </a:solidFill>
-                <a:latin typeface="Noto Sans CJK JP"/>
+                <a:latin typeface="BIZ UDPGothic"/>
               </a:rPr>
               <a:t>背景</a:t>
             </a:r>
@@ -4471,9 +4471,9 @@
                 <a:solidFill>
                   <a:srgbClr val="0B3A5B"/>
                 </a:solidFill>
-                <a:latin typeface="Noto Sans CJK JP"/>
-              </a:rPr>
-              <a:t>利用目的と音環境のずれ</a:t>
+                <a:latin typeface="BIZ UDPGothic"/>
+              </a:rPr>
+              <a:t>活動と音の希望を対応させる</a:t>
             </a:r>
           </a:p>
         </p:txBody>
@@ -4505,9 +4505,9 @@
                 <a:solidFill>
                   <a:srgbClr val="202A33"/>
                 </a:solidFill>
-                <a:latin typeface="Noto Sans CJK JP"/>
-              </a:rPr>
-              <a:t>同じ図書館でも、必要とする音環境は異なる。</a:t>
+                <a:latin typeface="BIZ UDPGothic"/>
+              </a:rPr>
+              <a:t>活動に合わせて、会話できる場所から静かな席まで選べるようにする。</a:t>
             </a:r>
           </a:p>
         </p:txBody>
@@ -4539,7 +4539,7 @@
                 <a:solidFill>
                   <a:srgbClr val="FFFFFF"/>
                 </a:solidFill>
-                <a:latin typeface="Noto Sans CJK JP"/>
+                <a:latin typeface="BIZ UDPGothic"/>
               </a:rPr>
               <a:t>架空の研究提案・未実施　／　効果を示す実測値はありません</a:t>
             </a:r>
@@ -4573,7 +4573,7 @@
                 <a:solidFill>
                   <a:srgbClr val="FFFFFF"/>
                 </a:solidFill>
-                <a:latin typeface="Noto Sans CJK JP"/>
+                <a:latin typeface="BIZ UDPGothic"/>
               </a:rPr>
               <a:t>02</a:t>
             </a:r>
@@ -4607,9 +4607,9 @@
                 <a:solidFill>
                   <a:srgbClr val="5D6B78"/>
                 </a:solidFill>
-                <a:latin typeface="Noto Sans CJK JP"/>
-              </a:rPr>
-              <a:t>読図：利用目的と期待する音環境の対応を読む。分類はこの提案の設計仮説。</a:t>
+                <a:latin typeface="BIZ UDPGothic"/>
+              </a:rPr>
+              <a:t>読図：活動と音の希望を対応させた設計仮説。実測した音量の尺度ではない。</a:t>
             </a:r>
           </a:p>
         </p:txBody>
@@ -4622,42 +4622,381 @@
         </p:nvSpPr>
         <p:spPr>
           <a:xfrm>
-            <a:off x="731520" y="2011680"/>
-            <a:ext cx="3657600" cy="411480"/>
-          </a:xfrm>
-          <a:prstGeom prst="rect">
-            <a:avLst/>
-          </a:prstGeom>
-          <a:noFill/>
-        </p:spPr>
-        <p:txBody>
-          <a:bodyPr wrap="square" lIns="0" rIns="0" tIns="0" bIns="0">
-            <a:spAutoFit/>
-          </a:bodyPr>
-          <a:lstStyle/>
-          <a:p>
-            <a:r>
-              <a:rPr sz="2300" b="1">
+            <a:off x="731520" y="2103120"/>
+            <a:ext cx="10058400" cy="411480"/>
+          </a:xfrm>
+          <a:prstGeom prst="rect">
+            <a:avLst/>
+          </a:prstGeom>
+          <a:noFill/>
+        </p:spPr>
+        <p:txBody>
+          <a:bodyPr wrap="square" lIns="0" rIns="0" tIns="0" bIns="0">
+            <a:spAutoFit/>
+          </a:bodyPr>
+          <a:lstStyle/>
+          <a:p>
+            <a:r>
+              <a:rPr sz="2000" b="1">
                 <a:solidFill>
                   <a:srgbClr val="0B3A5B"/>
                 </a:solidFill>
-                <a:latin typeface="Noto Sans CJK JP"/>
-              </a:rPr>
-              <a:t>読む・集中する</a:t>
+                <a:latin typeface="BIZ UDPGothic"/>
+              </a:rPr>
+              <a:t>会話できる側から、静かな側へ</a:t>
+            </a:r>
+          </a:p>
+        </p:txBody>
+      </p:sp>
+      <p:sp>
+        <p:nvSpPr>
+          <p:cNvPr id="15" name="Rectangle 14"/>
+          <p:cNvSpPr/>
+          <p:nvPr/>
+        </p:nvSpPr>
+        <p:spPr>
+          <a:xfrm>
+            <a:off x="731520" y="2834640"/>
+            <a:ext cx="3474720" cy="1005840"/>
+          </a:xfrm>
+          <a:prstGeom prst="rect">
+            <a:avLst/>
+          </a:prstGeom>
+          <a:solidFill>
+            <a:srgbClr val="0B3A5B"/>
+          </a:solidFill>
+          <a:ln>
+            <a:solidFill>
+              <a:srgbClr val="0B3A5B"/>
+            </a:solidFill>
+          </a:ln>
+        </p:spPr>
+        <p:style>
+          <a:lnRef idx="1">
+            <a:schemeClr val="accent1"/>
+          </a:lnRef>
+          <a:fillRef idx="3">
+            <a:schemeClr val="accent1"/>
+          </a:fillRef>
+          <a:effectRef idx="2">
+            <a:schemeClr val="accent1"/>
+          </a:effectRef>
+          <a:fontRef idx="minor">
+            <a:schemeClr val="lt1"/>
+          </a:fontRef>
+        </p:style>
+        <p:txBody>
+          <a:bodyPr rtlCol="0" anchor="ctr"/>
+          <a:lstStyle/>
+          <a:p>
+            <a:pPr algn="ctr"/>
+          </a:p>
+        </p:txBody>
+      </p:sp>
+      <p:sp>
+        <p:nvSpPr>
+          <p:cNvPr id="16" name="TextBox 15"/>
+          <p:cNvSpPr txBox="1"/>
+          <p:nvPr/>
+        </p:nvSpPr>
+        <p:spPr>
+          <a:xfrm>
+            <a:off x="914400" y="3108960"/>
+            <a:ext cx="3108960" cy="548640"/>
+          </a:xfrm>
+          <a:prstGeom prst="rect">
+            <a:avLst/>
+          </a:prstGeom>
+          <a:noFill/>
+        </p:spPr>
+        <p:txBody>
+          <a:bodyPr wrap="square" lIns="0" rIns="0" tIns="0" bIns="0">
+            <a:spAutoFit/>
+          </a:bodyPr>
+          <a:lstStyle/>
+          <a:p>
+            <a:r>
+              <a:rPr sz="1900" b="1">
+                <a:solidFill>
+                  <a:srgbClr val="FFFFFF"/>
+                </a:solidFill>
+                <a:latin typeface="BIZ UDPGothic"/>
+              </a:rPr>
+              <a:t>会話しながら本を選ぶ</a:t>
+            </a:r>
+          </a:p>
+        </p:txBody>
+      </p:sp>
+      <p:sp>
+        <p:nvSpPr>
+          <p:cNvPr id="17" name="TextBox 16"/>
+          <p:cNvSpPr txBox="1"/>
+          <p:nvPr/>
+        </p:nvSpPr>
+        <p:spPr>
+          <a:xfrm>
+            <a:off x="914400" y="4160520"/>
+            <a:ext cx="3108960" cy="548640"/>
+          </a:xfrm>
+          <a:prstGeom prst="rect">
+            <a:avLst/>
+          </a:prstGeom>
+          <a:noFill/>
+        </p:spPr>
+        <p:txBody>
+          <a:bodyPr wrap="square" lIns="0" rIns="0" tIns="0" bIns="0">
+            <a:spAutoFit/>
+          </a:bodyPr>
+          <a:lstStyle/>
+          <a:p>
+            <a:r>
+              <a:rPr sz="1900" b="0">
+                <a:solidFill>
+                  <a:srgbClr val="202A33"/>
+                </a:solidFill>
+                <a:latin typeface="BIZ UDPGothic"/>
+              </a:rPr>
+              <a:t>会話できる場所</a:t>
+            </a:r>
+          </a:p>
+        </p:txBody>
+      </p:sp>
+      <p:sp>
+        <p:nvSpPr>
+          <p:cNvPr id="18" name="Rectangle 17"/>
+          <p:cNvSpPr/>
+          <p:nvPr/>
+        </p:nvSpPr>
+        <p:spPr>
+          <a:xfrm>
+            <a:off x="4206240" y="2834640"/>
+            <a:ext cx="3474720" cy="1005840"/>
+          </a:xfrm>
+          <a:prstGeom prst="rect">
+            <a:avLst/>
+          </a:prstGeom>
+          <a:solidFill>
+            <a:srgbClr val="347B7F"/>
+          </a:solidFill>
+          <a:ln>
+            <a:solidFill>
+              <a:srgbClr val="347B7F"/>
+            </a:solidFill>
+          </a:ln>
+        </p:spPr>
+        <p:style>
+          <a:lnRef idx="1">
+            <a:schemeClr val="accent1"/>
+          </a:lnRef>
+          <a:fillRef idx="3">
+            <a:schemeClr val="accent1"/>
+          </a:fillRef>
+          <a:effectRef idx="2">
+            <a:schemeClr val="accent1"/>
+          </a:effectRef>
+          <a:fontRef idx="minor">
+            <a:schemeClr val="lt1"/>
+          </a:fontRef>
+        </p:style>
+        <p:txBody>
+          <a:bodyPr rtlCol="0" anchor="ctr"/>
+          <a:lstStyle/>
+          <a:p>
+            <a:pPr algn="ctr"/>
+          </a:p>
+        </p:txBody>
+      </p:sp>
+      <p:sp>
+        <p:nvSpPr>
+          <p:cNvPr id="19" name="TextBox 18"/>
+          <p:cNvSpPr txBox="1"/>
+          <p:nvPr/>
+        </p:nvSpPr>
+        <p:spPr>
+          <a:xfrm>
+            <a:off x="4389120" y="3108960"/>
+            <a:ext cx="3108960" cy="548640"/>
+          </a:xfrm>
+          <a:prstGeom prst="rect">
+            <a:avLst/>
+          </a:prstGeom>
+          <a:noFill/>
+        </p:spPr>
+        <p:txBody>
+          <a:bodyPr wrap="square" lIns="0" rIns="0" tIns="0" bIns="0">
+            <a:spAutoFit/>
+          </a:bodyPr>
+          <a:lstStyle/>
+          <a:p>
+            <a:r>
+              <a:rPr sz="1900" b="1">
+                <a:solidFill>
+                  <a:srgbClr val="FFFFFF"/>
+                </a:solidFill>
+                <a:latin typeface="BIZ UDPGothic"/>
+              </a:rPr>
+              <a:t>短く相談する</a:t>
+            </a:r>
+          </a:p>
+        </p:txBody>
+      </p:sp>
+      <p:sp>
+        <p:nvSpPr>
+          <p:cNvPr id="20" name="TextBox 19"/>
+          <p:cNvSpPr txBox="1"/>
+          <p:nvPr/>
+        </p:nvSpPr>
+        <p:spPr>
+          <a:xfrm>
+            <a:off x="4389120" y="4160520"/>
+            <a:ext cx="3108960" cy="548640"/>
+          </a:xfrm>
+          <a:prstGeom prst="rect">
+            <a:avLst/>
+          </a:prstGeom>
+          <a:noFill/>
+        </p:spPr>
+        <p:txBody>
+          <a:bodyPr wrap="square" lIns="0" rIns="0" tIns="0" bIns="0">
+            <a:spAutoFit/>
+          </a:bodyPr>
+          <a:lstStyle/>
+          <a:p>
+            <a:r>
+              <a:rPr sz="1900" b="0">
+                <a:solidFill>
+                  <a:srgbClr val="202A33"/>
+                </a:solidFill>
+                <a:latin typeface="BIZ UDPGothic"/>
+              </a:rPr>
+              <a:t>小声で相談できる席</a:t>
+            </a:r>
+          </a:p>
+        </p:txBody>
+      </p:sp>
+      <p:sp>
+        <p:nvSpPr>
+          <p:cNvPr id="21" name="Rectangle 20"/>
+          <p:cNvSpPr/>
+          <p:nvPr/>
+        </p:nvSpPr>
+        <p:spPr>
+          <a:xfrm>
+            <a:off x="7680960" y="2834640"/>
+            <a:ext cx="3474720" cy="1005840"/>
+          </a:xfrm>
+          <a:prstGeom prst="rect">
+            <a:avLst/>
+          </a:prstGeom>
+          <a:solidFill>
+            <a:srgbClr val="DDEAF1"/>
+          </a:solidFill>
+          <a:ln>
+            <a:solidFill>
+              <a:srgbClr val="DDEAF1"/>
+            </a:solidFill>
+          </a:ln>
+        </p:spPr>
+        <p:style>
+          <a:lnRef idx="1">
+            <a:schemeClr val="accent1"/>
+          </a:lnRef>
+          <a:fillRef idx="3">
+            <a:schemeClr val="accent1"/>
+          </a:fillRef>
+          <a:effectRef idx="2">
+            <a:schemeClr val="accent1"/>
+          </a:effectRef>
+          <a:fontRef idx="minor">
+            <a:schemeClr val="lt1"/>
+          </a:fontRef>
+        </p:style>
+        <p:txBody>
+          <a:bodyPr rtlCol="0" anchor="ctr"/>
+          <a:lstStyle/>
+          <a:p>
+            <a:pPr algn="ctr"/>
+          </a:p>
+        </p:txBody>
+      </p:sp>
+      <p:sp>
+        <p:nvSpPr>
+          <p:cNvPr id="22" name="TextBox 21"/>
+          <p:cNvSpPr txBox="1"/>
+          <p:nvPr/>
+        </p:nvSpPr>
+        <p:spPr>
+          <a:xfrm>
+            <a:off x="7863840" y="3108960"/>
+            <a:ext cx="3108960" cy="548640"/>
+          </a:xfrm>
+          <a:prstGeom prst="rect">
+            <a:avLst/>
+          </a:prstGeom>
+          <a:noFill/>
+        </p:spPr>
+        <p:txBody>
+          <a:bodyPr wrap="square" lIns="0" rIns="0" tIns="0" bIns="0">
+            <a:spAutoFit/>
+          </a:bodyPr>
+          <a:lstStyle/>
+          <a:p>
+            <a:r>
+              <a:rPr sz="1900" b="1">
+                <a:solidFill>
+                  <a:srgbClr val="0B3A5B"/>
+                </a:solidFill>
+                <a:latin typeface="BIZ UDPGothic"/>
+              </a:rPr>
+              <a:t>集中して読む</a:t>
+            </a:r>
+          </a:p>
+        </p:txBody>
+      </p:sp>
+      <p:sp>
+        <p:nvSpPr>
+          <p:cNvPr id="23" name="TextBox 22"/>
+          <p:cNvSpPr txBox="1"/>
+          <p:nvPr/>
+        </p:nvSpPr>
+        <p:spPr>
+          <a:xfrm>
+            <a:off x="7863840" y="4160520"/>
+            <a:ext cx="3108960" cy="548640"/>
+          </a:xfrm>
+          <a:prstGeom prst="rect">
+            <a:avLst/>
+          </a:prstGeom>
+          <a:noFill/>
+        </p:spPr>
+        <p:txBody>
+          <a:bodyPr wrap="square" lIns="0" rIns="0" tIns="0" bIns="0">
+            <a:spAutoFit/>
+          </a:bodyPr>
+          <a:lstStyle/>
+          <a:p>
+            <a:r>
+              <a:rPr sz="1900" b="0">
+                <a:solidFill>
+                  <a:srgbClr val="202A33"/>
+                </a:solidFill>
+                <a:latin typeface="BIZ UDPGothic"/>
+              </a:rPr>
+              <a:t>静かな閲覧席</a:t>
             </a:r>
           </a:p>
         </p:txBody>
       </p:sp>
       <p:cxnSp>
         <p:nvCxnSpPr>
-          <p:cNvPr id="15" name="Connector 14"/>
+          <p:cNvPr id="24" name="Connector 23"/>
           <p:cNvCxnSpPr/>
           <p:nvPr/>
         </p:nvCxnSpPr>
         <p:spPr>
           <a:xfrm>
-            <a:off x="4572000" y="2231136"/>
-            <a:ext cx="1097280" cy="0"/>
+            <a:off x="868680" y="5120640"/>
+            <a:ext cx="10104120" cy="0"/>
           </a:xfrm>
           <a:prstGeom prst="line">
             <a:avLst/>
@@ -4666,6 +5005,7 @@
             <a:solidFill>
               <a:srgbClr val="347B7F"/>
             </a:solidFill>
+            <a:tailEnd type="triangle"/>
           </a:ln>
         </p:spPr>
         <p:style>
@@ -4685,240 +5025,34 @@
       </p:cxnSp>
       <p:sp>
         <p:nvSpPr>
-          <p:cNvPr id="16" name="TextBox 15"/>
-          <p:cNvSpPr txBox="1"/>
-          <p:nvPr/>
-        </p:nvSpPr>
-        <p:spPr>
-          <a:xfrm>
-            <a:off x="6217920" y="2011680"/>
-            <a:ext cx="4572000" cy="548640"/>
-          </a:xfrm>
-          <a:prstGeom prst="rect">
-            <a:avLst/>
-          </a:prstGeom>
-          <a:noFill/>
-        </p:spPr>
-        <p:txBody>
-          <a:bodyPr wrap="square" lIns="0" rIns="0" tIns="0" bIns="0">
-            <a:spAutoFit/>
-          </a:bodyPr>
-          <a:lstStyle/>
-          <a:p>
-            <a:r>
-              <a:rPr sz="2000" b="0">
-                <a:solidFill>
-                  <a:srgbClr val="202A33"/>
-                </a:solidFill>
-                <a:latin typeface="Noto Sans CJK JP"/>
-              </a:rPr>
-              <a:t>静かな席を探す</a:t>
-            </a:r>
-          </a:p>
-        </p:txBody>
-      </p:sp>
-      <p:sp>
-        <p:nvSpPr>
-          <p:cNvPr id="17" name="TextBox 16"/>
-          <p:cNvSpPr txBox="1"/>
-          <p:nvPr/>
-        </p:nvSpPr>
-        <p:spPr>
-          <a:xfrm>
-            <a:off x="731520" y="2971800"/>
-            <a:ext cx="3657600" cy="411480"/>
-          </a:xfrm>
-          <a:prstGeom prst="rect">
-            <a:avLst/>
-          </a:prstGeom>
-          <a:noFill/>
-        </p:spPr>
-        <p:txBody>
-          <a:bodyPr wrap="square" lIns="0" rIns="0" tIns="0" bIns="0">
-            <a:spAutoFit/>
-          </a:bodyPr>
-          <a:lstStyle/>
-          <a:p>
-            <a:r>
-              <a:rPr sz="2300" b="1">
-                <a:solidFill>
-                  <a:srgbClr val="0B3A5B"/>
-                </a:solidFill>
-                <a:latin typeface="Noto Sans CJK JP"/>
-              </a:rPr>
-              <a:t>短く相談する</a:t>
-            </a:r>
-          </a:p>
-        </p:txBody>
-      </p:sp>
-      <p:cxnSp>
-        <p:nvCxnSpPr>
-          <p:cNvPr id="18" name="Connector 17"/>
-          <p:cNvCxnSpPr/>
-          <p:nvPr/>
-        </p:nvCxnSpPr>
-        <p:spPr>
-          <a:xfrm>
-            <a:off x="4572000" y="3191256"/>
-            <a:ext cx="1097280" cy="0"/>
-          </a:xfrm>
-          <a:prstGeom prst="line">
-            <a:avLst/>
-          </a:prstGeom>
-          <a:ln w="25400">
-            <a:solidFill>
-              <a:srgbClr val="347B7F"/>
-            </a:solidFill>
-          </a:ln>
-        </p:spPr>
-        <p:style>
-          <a:lnRef idx="2">
-            <a:schemeClr val="accent1"/>
-          </a:lnRef>
-          <a:fillRef idx="0">
-            <a:schemeClr val="accent1"/>
-          </a:fillRef>
-          <a:effectRef idx="1">
-            <a:schemeClr val="accent1"/>
-          </a:effectRef>
-          <a:fontRef idx="minor">
-            <a:schemeClr val="tx1"/>
-          </a:fontRef>
-        </p:style>
-      </p:cxnSp>
-      <p:sp>
-        <p:nvSpPr>
-          <p:cNvPr id="19" name="TextBox 18"/>
-          <p:cNvSpPr txBox="1"/>
-          <p:nvPr/>
-        </p:nvSpPr>
-        <p:spPr>
-          <a:xfrm>
-            <a:off x="6217920" y="2971800"/>
-            <a:ext cx="4572000" cy="548640"/>
-          </a:xfrm>
-          <a:prstGeom prst="rect">
-            <a:avLst/>
-          </a:prstGeom>
-          <a:noFill/>
-        </p:spPr>
-        <p:txBody>
-          <a:bodyPr wrap="square" lIns="0" rIns="0" tIns="0" bIns="0">
-            <a:spAutoFit/>
-          </a:bodyPr>
-          <a:lstStyle/>
-          <a:p>
-            <a:r>
-              <a:rPr sz="2000" b="0">
-                <a:solidFill>
-                  <a:srgbClr val="202A33"/>
-                </a:solidFill>
-                <a:latin typeface="Noto Sans CJK JP"/>
-              </a:rPr>
-              <a:t>小声で話せる席を探す</a:t>
-            </a:r>
-          </a:p>
-        </p:txBody>
-      </p:sp>
-      <p:sp>
-        <p:nvSpPr>
-          <p:cNvPr id="20" name="TextBox 19"/>
-          <p:cNvSpPr txBox="1"/>
-          <p:nvPr/>
-        </p:nvSpPr>
-        <p:spPr>
-          <a:xfrm>
-            <a:off x="731520" y="3931920"/>
-            <a:ext cx="3657600" cy="411480"/>
-          </a:xfrm>
-          <a:prstGeom prst="rect">
-            <a:avLst/>
-          </a:prstGeom>
-          <a:noFill/>
-        </p:spPr>
-        <p:txBody>
-          <a:bodyPr wrap="square" lIns="0" rIns="0" tIns="0" bIns="0">
-            <a:spAutoFit/>
-          </a:bodyPr>
-          <a:lstStyle/>
-          <a:p>
-            <a:r>
-              <a:rPr sz="2300" b="1">
-                <a:solidFill>
-                  <a:srgbClr val="0B3A5B"/>
-                </a:solidFill>
-                <a:latin typeface="Noto Sans CJK JP"/>
-              </a:rPr>
-              <a:t>活動を共有する</a:t>
-            </a:r>
-          </a:p>
-        </p:txBody>
-      </p:sp>
-      <p:cxnSp>
-        <p:nvCxnSpPr>
-          <p:cNvPr id="21" name="Connector 20"/>
-          <p:cNvCxnSpPr/>
-          <p:nvPr/>
-        </p:nvCxnSpPr>
-        <p:spPr>
-          <a:xfrm>
-            <a:off x="4572000" y="4151376"/>
-            <a:ext cx="1097280" cy="0"/>
-          </a:xfrm>
-          <a:prstGeom prst="line">
-            <a:avLst/>
-          </a:prstGeom>
-          <a:ln w="25400">
-            <a:solidFill>
-              <a:srgbClr val="347B7F"/>
-            </a:solidFill>
-          </a:ln>
-        </p:spPr>
-        <p:style>
-          <a:lnRef idx="2">
-            <a:schemeClr val="accent1"/>
-          </a:lnRef>
-          <a:fillRef idx="0">
-            <a:schemeClr val="accent1"/>
-          </a:fillRef>
-          <a:effectRef idx="1">
-            <a:schemeClr val="accent1"/>
-          </a:effectRef>
-          <a:fontRef idx="minor">
-            <a:schemeClr val="tx1"/>
-          </a:fontRef>
-        </p:style>
-      </p:cxnSp>
-      <p:sp>
-        <p:nvSpPr>
-          <p:cNvPr id="22" name="TextBox 21"/>
-          <p:cNvSpPr txBox="1"/>
-          <p:nvPr/>
-        </p:nvSpPr>
-        <p:spPr>
-          <a:xfrm>
-            <a:off x="6217920" y="3931920"/>
-            <a:ext cx="4572000" cy="548640"/>
-          </a:xfrm>
-          <a:prstGeom prst="rect">
-            <a:avLst/>
-          </a:prstGeom>
-          <a:noFill/>
-        </p:spPr>
-        <p:txBody>
-          <a:bodyPr wrap="square" lIns="0" rIns="0" tIns="0" bIns="0">
-            <a:spAutoFit/>
-          </a:bodyPr>
-          <a:lstStyle/>
-          <a:p>
-            <a:r>
-              <a:rPr sz="2000" b="0">
-                <a:solidFill>
-                  <a:srgbClr val="202A33"/>
-                </a:solidFill>
-                <a:latin typeface="Noto Sans CJK JP"/>
-              </a:rPr>
-              <a:t>会話できる場所を探す</a:t>
+          <p:cNvPr id="25" name="TextBox 24"/>
+          <p:cNvSpPr txBox="1"/>
+          <p:nvPr/>
+        </p:nvSpPr>
+        <p:spPr>
+          <a:xfrm>
+            <a:off x="868680" y="5349240"/>
+            <a:ext cx="10058400" cy="320040"/>
+          </a:xfrm>
+          <a:prstGeom prst="rect">
+            <a:avLst/>
+          </a:prstGeom>
+          <a:noFill/>
+        </p:spPr>
+        <p:txBody>
+          <a:bodyPr wrap="square" lIns="0" rIns="0" tIns="0" bIns="0">
+            <a:spAutoFit/>
+          </a:bodyPr>
+          <a:lstStyle/>
+          <a:p>
+            <a:r>
+              <a:rPr sz="1300" b="0">
+                <a:solidFill>
+                  <a:srgbClr val="5D6B78"/>
+                </a:solidFill>
+                <a:latin typeface="BIZ UDPGothic"/>
+              </a:rPr>
+              <a:t>音への希望は人や状況で変わる。固定した利用者タイプには分けない。</a:t>
             </a:r>
           </a:p>
         </p:txBody>
@@ -5054,7 +5188,7 @@
                 <a:solidFill>
                   <a:srgbClr val="5D6B78"/>
                 </a:solidFill>
-                <a:latin typeface="Noto Sans CJK JP"/>
+                <a:latin typeface="BIZ UDPGothic"/>
               </a:rPr>
               <a:t>静けさを選べる図書館</a:t>
             </a:r>
@@ -5088,7 +5222,7 @@
                 <a:solidFill>
                   <a:srgbClr val="5D6B78"/>
                 </a:solidFill>
-                <a:latin typeface="Noto Sans CJK JP"/>
+                <a:latin typeface="BIZ UDPGothic"/>
               </a:rPr>
               <a:t>空間モデル</a:t>
             </a:r>
@@ -5122,7 +5256,7 @@
                 <a:solidFill>
                   <a:srgbClr val="0B3A5B"/>
                 </a:solidFill>
-                <a:latin typeface="Noto Sans CJK JP"/>
+                <a:latin typeface="BIZ UDPGothic"/>
               </a:rPr>
               <a:t>ゾーンの境界と音の伝わり方</a:t>
             </a:r>
@@ -5156,7 +5290,7 @@
                 <a:solidFill>
                   <a:srgbClr val="202A33"/>
                 </a:solidFill>
-                <a:latin typeface="Noto Sans CJK JP"/>
+                <a:latin typeface="BIZ UDPGothic"/>
               </a:rPr>
               <a:t>静かな席へ向かう動線と、会話のある活動を分けて考える。</a:t>
             </a:r>
@@ -5190,7 +5324,7 @@
                 <a:solidFill>
                   <a:srgbClr val="FFFFFF"/>
                 </a:solidFill>
-                <a:latin typeface="Noto Sans CJK JP"/>
+                <a:latin typeface="BIZ UDPGothic"/>
               </a:rPr>
               <a:t>架空の研究提案・未実施　／　効果を示す実測値はありません</a:t>
             </a:r>
@@ -5224,7 +5358,7 @@
                 <a:solidFill>
                   <a:srgbClr val="FFFFFF"/>
                 </a:solidFill>
-                <a:latin typeface="Noto Sans CJK JP"/>
+                <a:latin typeface="BIZ UDPGothic"/>
               </a:rPr>
               <a:t>03</a:t>
             </a:r>
@@ -5258,7 +5392,7 @@
                 <a:solidFill>
                   <a:srgbClr val="5D6B78"/>
                 </a:solidFill>
-                <a:latin typeface="Noto Sans CJK JP"/>
+                <a:latin typeface="BIZ UDPGothic"/>
               </a:rPr>
               <a:t>読図：入口から静穏ゾーンへ進む経路と、隣接する境界を見る。縮尺のない概念図。</a:t>
             </a:r>
@@ -5427,7 +5561,7 @@
                 <a:solidFill>
                   <a:srgbClr val="FFFFFF"/>
                 </a:solidFill>
-                <a:latin typeface="Noto Sans CJK JP"/>
+                <a:latin typeface="BIZ UDPGothic"/>
               </a:rPr>
               <a:t>会話</a:t>
             </a:r>
@@ -5461,7 +5595,7 @@
                 <a:solidFill>
                   <a:srgbClr val="FFFFFF"/>
                 </a:solidFill>
-                <a:latin typeface="Noto Sans CJK JP"/>
+                <a:latin typeface="BIZ UDPGothic"/>
               </a:rPr>
               <a:t>活動・相談</a:t>
             </a:r>
@@ -5495,7 +5629,7 @@
                 <a:solidFill>
                   <a:srgbClr val="FFFFFF"/>
                 </a:solidFill>
-                <a:latin typeface="Noto Sans CJK JP"/>
+                <a:latin typeface="BIZ UDPGothic"/>
               </a:rPr>
               <a:t>移行</a:t>
             </a:r>
@@ -5529,7 +5663,7 @@
                 <a:solidFill>
                   <a:srgbClr val="FFFFFF"/>
                 </a:solidFill>
-                <a:latin typeface="Noto Sans CJK JP"/>
+                <a:latin typeface="BIZ UDPGothic"/>
               </a:rPr>
               <a:t>通路・書架</a:t>
             </a:r>
@@ -5563,7 +5697,7 @@
                 <a:solidFill>
                   <a:srgbClr val="0B3A5B"/>
                 </a:solidFill>
-                <a:latin typeface="Noto Sans CJK JP"/>
+                <a:latin typeface="BIZ UDPGothic"/>
               </a:rPr>
               <a:t>静穏</a:t>
             </a:r>
@@ -5597,7 +5731,7 @@
                 <a:solidFill>
                   <a:srgbClr val="0B3A5B"/>
                 </a:solidFill>
-                <a:latin typeface="Noto Sans CJK JP"/>
+                <a:latin typeface="BIZ UDPGothic"/>
               </a:rPr>
               <a:t>閲覧・集中</a:t>
             </a:r>
@@ -5612,8 +5746,8 @@
         </p:nvSpPr>
         <p:spPr>
           <a:xfrm>
-            <a:off x="731520" y="4983480"/>
-            <a:ext cx="10058400" cy="548640"/>
+            <a:off x="868680" y="4983480"/>
+            <a:ext cx="1280160" cy="365760"/>
           </a:xfrm>
           <a:prstGeom prst="rect">
             <a:avLst/>
@@ -5631,9 +5765,183 @@
                 <a:solidFill>
                   <a:srgbClr val="5D6B78"/>
                 </a:solidFill>
-                <a:latin typeface="Noto Sans CJK JP"/>
-              </a:rPr>
-              <a:t>入口　　　　　　　　　　　案内表示　　　　　　　　　　静かな席</a:t>
+                <a:latin typeface="BIZ UDPGothic"/>
+              </a:rPr>
+              <a:t>入口</a:t>
+            </a:r>
+          </a:p>
+        </p:txBody>
+      </p:sp>
+      <p:cxnSp>
+        <p:nvCxnSpPr>
+          <p:cNvPr id="24" name="Connector 23"/>
+          <p:cNvCxnSpPr/>
+          <p:nvPr/>
+        </p:nvCxnSpPr>
+        <p:spPr>
+          <a:xfrm>
+            <a:off x="1005840" y="4434840"/>
+            <a:ext cx="4206240" cy="0"/>
+          </a:xfrm>
+          <a:prstGeom prst="line">
+            <a:avLst/>
+          </a:prstGeom>
+          <a:ln w="38100">
+            <a:solidFill>
+              <a:srgbClr val="FFFFFF"/>
+            </a:solidFill>
+            <a:tailEnd type="triangle"/>
+          </a:ln>
+        </p:spPr>
+        <p:style>
+          <a:lnRef idx="2">
+            <a:schemeClr val="accent1"/>
+          </a:lnRef>
+          <a:fillRef idx="0">
+            <a:schemeClr val="accent1"/>
+          </a:fillRef>
+          <a:effectRef idx="1">
+            <a:schemeClr val="accent1"/>
+          </a:effectRef>
+          <a:fontRef idx="minor">
+            <a:schemeClr val="tx1"/>
+          </a:fontRef>
+        </p:style>
+      </p:cxnSp>
+      <p:sp>
+        <p:nvSpPr>
+          <p:cNvPr id="25" name="TextBox 24"/>
+          <p:cNvSpPr txBox="1"/>
+          <p:nvPr/>
+        </p:nvSpPr>
+        <p:spPr>
+          <a:xfrm>
+            <a:off x="3337560" y="3977639"/>
+            <a:ext cx="2468880" cy="347472"/>
+          </a:xfrm>
+          <a:prstGeom prst="rect">
+            <a:avLst/>
+          </a:prstGeom>
+          <a:noFill/>
+        </p:spPr>
+        <p:txBody>
+          <a:bodyPr wrap="square" lIns="0" rIns="0" tIns="0" bIns="0">
+            <a:spAutoFit/>
+          </a:bodyPr>
+          <a:lstStyle/>
+          <a:p>
+            <a:r>
+              <a:rPr sz="1600" b="1">
+                <a:solidFill>
+                  <a:srgbClr val="FFFFFF"/>
+                </a:solidFill>
+                <a:latin typeface="BIZ UDPGothic"/>
+              </a:rPr>
+              <a:t>本を探す</a:t>
+            </a:r>
+          </a:p>
+        </p:txBody>
+      </p:sp>
+      <p:cxnSp>
+        <p:nvCxnSpPr>
+          <p:cNvPr id="26" name="Connector 25"/>
+          <p:cNvCxnSpPr/>
+          <p:nvPr/>
+        </p:nvCxnSpPr>
+        <p:spPr>
+          <a:xfrm>
+            <a:off x="1005840" y="5468112"/>
+            <a:ext cx="9464040" cy="0"/>
+          </a:xfrm>
+          <a:prstGeom prst="line">
+            <a:avLst/>
+          </a:prstGeom>
+          <a:ln w="25400">
+            <a:solidFill>
+              <a:srgbClr val="0B3A5B"/>
+            </a:solidFill>
+            <a:tailEnd type="triangle"/>
+          </a:ln>
+        </p:spPr>
+        <p:style>
+          <a:lnRef idx="2">
+            <a:schemeClr val="accent1"/>
+          </a:lnRef>
+          <a:fillRef idx="0">
+            <a:schemeClr val="accent1"/>
+          </a:fillRef>
+          <a:effectRef idx="1">
+            <a:schemeClr val="accent1"/>
+          </a:effectRef>
+          <a:fontRef idx="minor">
+            <a:schemeClr val="tx1"/>
+          </a:fontRef>
+        </p:style>
+      </p:cxnSp>
+      <p:sp>
+        <p:nvSpPr>
+          <p:cNvPr id="27" name="TextBox 26"/>
+          <p:cNvSpPr txBox="1"/>
+          <p:nvPr/>
+        </p:nvSpPr>
+        <p:spPr>
+          <a:xfrm>
+            <a:off x="3017520" y="4983480"/>
+            <a:ext cx="6309360" cy="365760"/>
+          </a:xfrm>
+          <a:prstGeom prst="rect">
+            <a:avLst/>
+          </a:prstGeom>
+          <a:noFill/>
+        </p:spPr>
+        <p:txBody>
+          <a:bodyPr wrap="square" lIns="0" rIns="0" tIns="0" bIns="0">
+            <a:spAutoFit/>
+          </a:bodyPr>
+          <a:lstStyle/>
+          <a:p>
+            <a:r>
+              <a:rPr sz="1400" b="1">
+                <a:solidFill>
+                  <a:srgbClr val="0B3A5B"/>
+                </a:solidFill>
+                <a:latin typeface="BIZ UDPGothic"/>
+              </a:rPr>
+              <a:t>集中席へ：活動域を通らない経路</a:t>
+            </a:r>
+          </a:p>
+        </p:txBody>
+      </p:sp>
+      <p:sp>
+        <p:nvSpPr>
+          <p:cNvPr id="28" name="TextBox 27"/>
+          <p:cNvSpPr txBox="1"/>
+          <p:nvPr/>
+        </p:nvSpPr>
+        <p:spPr>
+          <a:xfrm>
+            <a:off x="9646920" y="4983480"/>
+            <a:ext cx="1463040" cy="365760"/>
+          </a:xfrm>
+          <a:prstGeom prst="rect">
+            <a:avLst/>
+          </a:prstGeom>
+          <a:noFill/>
+        </p:spPr>
+        <p:txBody>
+          <a:bodyPr wrap="square" lIns="0" rIns="0" tIns="0" bIns="0">
+            <a:spAutoFit/>
+          </a:bodyPr>
+          <a:lstStyle/>
+          <a:p>
+            <a:r>
+              <a:rPr sz="1400" b="0">
+                <a:solidFill>
+                  <a:srgbClr val="0B3A5B"/>
+                </a:solidFill>
+                <a:latin typeface="BIZ UDPGothic"/>
+              </a:rPr>
+              <a:t>集中席</a:t>
             </a:r>
           </a:p>
         </p:txBody>
@@ -5769,7 +6077,7 @@
                 <a:solidFill>
                   <a:srgbClr val="5D6B78"/>
                 </a:solidFill>
-                <a:latin typeface="Noto Sans CJK JP"/>
+                <a:latin typeface="BIZ UDPGothic"/>
               </a:rPr>
               <a:t>静けさを選べる図書館</a:t>
             </a:r>
@@ -5803,7 +6111,7 @@
                 <a:solidFill>
                   <a:srgbClr val="5D6B78"/>
                 </a:solidFill>
-                <a:latin typeface="Noto Sans CJK JP"/>
+                <a:latin typeface="BIZ UDPGothic"/>
               </a:rPr>
               <a:t>研究仮説</a:t>
             </a:r>
@@ -5837,7 +6145,7 @@
                 <a:solidFill>
                   <a:srgbClr val="0B3A5B"/>
                 </a:solidFill>
-                <a:latin typeface="Noto Sans CJK JP"/>
+                <a:latin typeface="BIZ UDPGothic"/>
               </a:rPr>
               <a:t>検証する関係</a:t>
             </a:r>
@@ -5871,7 +6179,7 @@
                 <a:solidFill>
                   <a:srgbClr val="202A33"/>
                 </a:solidFill>
-                <a:latin typeface="Noto Sans CJK JP"/>
+                <a:latin typeface="BIZ UDPGothic"/>
               </a:rPr>
               <a:t>配置と表示が、席の選択と音環境の評価に関係するか。</a:t>
             </a:r>
@@ -5905,7 +6213,7 @@
                 <a:solidFill>
                   <a:srgbClr val="FFFFFF"/>
                 </a:solidFill>
-                <a:latin typeface="Noto Sans CJK JP"/>
+                <a:latin typeface="BIZ UDPGothic"/>
               </a:rPr>
               <a:t>架空の研究提案・未実施　／　効果を示す実測値はありません</a:t>
             </a:r>
@@ -5939,7 +6247,7 @@
                 <a:solidFill>
                   <a:srgbClr val="FFFFFF"/>
                 </a:solidFill>
-                <a:latin typeface="Noto Sans CJK JP"/>
+                <a:latin typeface="BIZ UDPGothic"/>
               </a:rPr>
               <a:t>04</a:t>
             </a:r>
@@ -5973,7 +6281,7 @@
                 <a:solidFill>
                   <a:srgbClr val="5D6B78"/>
                 </a:solidFill>
-                <a:latin typeface="Noto Sans CJK JP"/>
+                <a:latin typeface="BIZ UDPGothic"/>
               </a:rPr>
               <a:t>読図：左は介入する条件、中央は行動、右は評価。線は検証候補で、因果関係の実証ではない。</a:t>
             </a:r>
@@ -6007,7 +6315,7 @@
                 <a:solidFill>
                   <a:srgbClr val="0B3A5B"/>
                 </a:solidFill>
-                <a:latin typeface="Noto Sans CJK JP"/>
+                <a:latin typeface="BIZ UDPGothic"/>
               </a:rPr>
               <a:t>配置・表示</a:t>
             </a:r>
@@ -6041,7 +6349,7 @@
                 <a:solidFill>
                   <a:srgbClr val="202A33"/>
                 </a:solidFill>
-                <a:latin typeface="Noto Sans CJK JP"/>
+                <a:latin typeface="BIZ UDPGothic"/>
               </a:rPr>
               <a:t>境界の配置</a:t>
             </a:r>
@@ -6052,7 +6360,7 @@
                 <a:solidFill>
                   <a:srgbClr val="202A33"/>
                 </a:solidFill>
-                <a:latin typeface="Noto Sans CJK JP"/>
+                <a:latin typeface="BIZ UDPGothic"/>
               </a:rPr>
               <a:t>音のルールの説明</a:t>
             </a:r>
@@ -6086,7 +6394,7 @@
                 <a:solidFill>
                   <a:srgbClr val="0B3A5B"/>
                 </a:solidFill>
-                <a:latin typeface="Noto Sans CJK JP"/>
+                <a:latin typeface="BIZ UDPGothic"/>
               </a:rPr>
               <a:t>席の選択</a:t>
             </a:r>
@@ -6120,7 +6428,7 @@
                 <a:solidFill>
                   <a:srgbClr val="202A33"/>
                 </a:solidFill>
-                <a:latin typeface="Noto Sans CJK JP"/>
+                <a:latin typeface="BIZ UDPGothic"/>
               </a:rPr>
               <a:t>希望に合う席を選べるか</a:t>
             </a:r>
@@ -6131,7 +6439,7 @@
                 <a:solidFill>
                   <a:srgbClr val="202A33"/>
                 </a:solidFill>
-                <a:latin typeface="Noto Sans CJK JP"/>
+                <a:latin typeface="BIZ UDPGothic"/>
               </a:rPr>
               <a:t>迷いや移動が起きるか</a:t>
             </a:r>
@@ -6165,7 +6473,7 @@
                 <a:solidFill>
                   <a:srgbClr val="0B3A5B"/>
                 </a:solidFill>
-                <a:latin typeface="Noto Sans CJK JP"/>
+                <a:latin typeface="BIZ UDPGothic"/>
               </a:rPr>
               <a:t>音環境の評価</a:t>
             </a:r>
@@ -6199,7 +6507,7 @@
                 <a:solidFill>
                   <a:srgbClr val="202A33"/>
                 </a:solidFill>
-                <a:latin typeface="Noto Sans CJK JP"/>
+                <a:latin typeface="BIZ UDPGothic"/>
               </a:rPr>
               <a:t>集中しやすさ</a:t>
             </a:r>
@@ -6210,7 +6518,7 @@
                 <a:solidFill>
                   <a:srgbClr val="202A33"/>
                 </a:solidFill>
-                <a:latin typeface="Noto Sans CJK JP"/>
+                <a:latin typeface="BIZ UDPGothic"/>
               </a:rPr>
               <a:t>会話のしやすさ</a:t>
             </a:r>
@@ -6235,6 +6543,7 @@
             <a:solidFill>
               <a:srgbClr val="347B7F"/>
             </a:solidFill>
+            <a:tailEnd type="triangle"/>
           </a:ln>
         </p:spPr>
         <p:style>
@@ -6270,6 +6579,7 @@
             <a:solidFill>
               <a:srgbClr val="347B7F"/>
             </a:solidFill>
+            <a:tailEnd type="triangle"/>
           </a:ln>
         </p:spPr>
         <p:style>
@@ -6295,6 +6605,74 @@
         </p:nvSpPr>
         <p:spPr>
           <a:xfrm>
+            <a:off x="3246120" y="2331720"/>
+            <a:ext cx="1280160" cy="274320"/>
+          </a:xfrm>
+          <a:prstGeom prst="rect">
+            <a:avLst/>
+          </a:prstGeom>
+          <a:noFill/>
+        </p:spPr>
+        <p:txBody>
+          <a:bodyPr wrap="square" lIns="0" rIns="0" tIns="0" bIns="0">
+            <a:spAutoFit/>
+          </a:bodyPr>
+          <a:lstStyle/>
+          <a:p>
+            <a:r>
+              <a:rPr sz="1000" b="0">
+                <a:solidFill>
+                  <a:srgbClr val="5D6B78"/>
+                </a:solidFill>
+                <a:latin typeface="BIZ UDPGothic"/>
+              </a:rPr>
+              <a:t>検証候補</a:t>
+            </a:r>
+          </a:p>
+        </p:txBody>
+      </p:sp>
+      <p:sp>
+        <p:nvSpPr>
+          <p:cNvPr id="23" name="TextBox 22"/>
+          <p:cNvSpPr txBox="1"/>
+          <p:nvPr/>
+        </p:nvSpPr>
+        <p:spPr>
+          <a:xfrm>
+            <a:off x="7223760" y="2331720"/>
+            <a:ext cx="1280160" cy="274320"/>
+          </a:xfrm>
+          <a:prstGeom prst="rect">
+            <a:avLst/>
+          </a:prstGeom>
+          <a:noFill/>
+        </p:spPr>
+        <p:txBody>
+          <a:bodyPr wrap="square" lIns="0" rIns="0" tIns="0" bIns="0">
+            <a:spAutoFit/>
+          </a:bodyPr>
+          <a:lstStyle/>
+          <a:p>
+            <a:r>
+              <a:rPr sz="1000" b="0">
+                <a:solidFill>
+                  <a:srgbClr val="5D6B78"/>
+                </a:solidFill>
+                <a:latin typeface="BIZ UDPGothic"/>
+              </a:rPr>
+              <a:t>検証候補</a:t>
+            </a:r>
+          </a:p>
+        </p:txBody>
+      </p:sp>
+      <p:sp>
+        <p:nvSpPr>
+          <p:cNvPr id="24" name="TextBox 23"/>
+          <p:cNvSpPr txBox="1"/>
+          <p:nvPr/>
+        </p:nvSpPr>
+        <p:spPr>
+          <a:xfrm>
             <a:off x="731520" y="4709160"/>
             <a:ext cx="10058400" cy="457200"/>
           </a:xfrm>
@@ -6314,7 +6692,7 @@
                 <a:solidFill>
                   <a:srgbClr val="5D6B78"/>
                 </a:solidFill>
-                <a:latin typeface="Noto Sans CJK JP"/>
+                <a:latin typeface="BIZ UDPGothic"/>
               </a:rPr>
               <a:t>交絡の候補：混雑、時間帯、利用目的、活動内容</a:t>
             </a:r>
@@ -6452,7 +6830,7 @@
                 <a:solidFill>
                   <a:srgbClr val="5D6B78"/>
                 </a:solidFill>
-                <a:latin typeface="Noto Sans CJK JP"/>
+                <a:latin typeface="BIZ UDPGothic"/>
               </a:rPr>
               <a:t>静けさを選べる図書館</a:t>
             </a:r>
@@ -6486,7 +6864,7 @@
                 <a:solidFill>
                   <a:srgbClr val="5D6B78"/>
                 </a:solidFill>
-                <a:latin typeface="Noto Sans CJK JP"/>
+                <a:latin typeface="BIZ UDPGothic"/>
               </a:rPr>
               <a:t>比較条件</a:t>
             </a:r>
@@ -6520,7 +6898,7 @@
                 <a:solidFill>
                   <a:srgbClr val="0B3A5B"/>
                 </a:solidFill>
-                <a:latin typeface="Noto Sans CJK JP"/>
+                <a:latin typeface="BIZ UDPGothic"/>
               </a:rPr>
               <a:t>配置案の比較</a:t>
             </a:r>
@@ -6554,7 +6932,7 @@
                 <a:solidFill>
                   <a:srgbClr val="202A33"/>
                 </a:solidFill>
-                <a:latin typeface="Noto Sans CJK JP"/>
+                <a:latin typeface="BIZ UDPGothic"/>
               </a:rPr>
               <a:t>案Aと案Bを、同じ観察項目で比較する。</a:t>
             </a:r>
@@ -6588,7 +6966,7 @@
                 <a:solidFill>
                   <a:srgbClr val="FFFFFF"/>
                 </a:solidFill>
-                <a:latin typeface="Noto Sans CJK JP"/>
+                <a:latin typeface="BIZ UDPGothic"/>
               </a:rPr>
               <a:t>架空の研究提案・未実施　／　効果を示す実測値はありません</a:t>
             </a:r>
@@ -6622,7 +7000,7 @@
                 <a:solidFill>
                   <a:srgbClr val="FFFFFF"/>
                 </a:solidFill>
-                <a:latin typeface="Noto Sans CJK JP"/>
+                <a:latin typeface="BIZ UDPGothic"/>
               </a:rPr>
               <a:t>05</a:t>
             </a:r>
@@ -6656,7 +7034,7 @@
                 <a:solidFill>
                   <a:srgbClr val="5D6B78"/>
                 </a:solidFill>
-                <a:latin typeface="Noto Sans CJK JP"/>
+                <a:latin typeface="BIZ UDPGothic"/>
               </a:rPr>
               <a:t>読表：境界と表示だけを先に比較する。席数や面積の最終設定は現地条件の確認後に決める。</a:t>
             </a:r>
@@ -6735,7 +7113,7 @@
                 <a:solidFill>
                   <a:srgbClr val="FFFFFF"/>
                 </a:solidFill>
-                <a:latin typeface="Noto Sans CJK JP"/>
+                <a:latin typeface="BIZ UDPGothic"/>
               </a:rPr>
               <a:t>比較する条件</a:t>
             </a:r>
@@ -6814,7 +7192,7 @@
                 <a:solidFill>
                   <a:srgbClr val="FFFFFF"/>
                 </a:solidFill>
-                <a:latin typeface="Noto Sans CJK JP"/>
+                <a:latin typeface="BIZ UDPGothic"/>
               </a:rPr>
               <a:t>案A：境界を明示</a:t>
             </a:r>
@@ -6893,7 +7271,7 @@
                 <a:solidFill>
                   <a:srgbClr val="FFFFFF"/>
                 </a:solidFill>
-                <a:latin typeface="Noto Sans CJK JP"/>
+                <a:latin typeface="BIZ UDPGothic"/>
               </a:rPr>
               <a:t>案B：ゆるやかな移行</a:t>
             </a:r>
@@ -6927,7 +7305,7 @@
                 <a:solidFill>
                   <a:srgbClr val="202A33"/>
                 </a:solidFill>
-                <a:latin typeface="Noto Sans CJK JP"/>
+                <a:latin typeface="BIZ UDPGothic"/>
               </a:rPr>
               <a:t>ゾーン境界</a:t>
             </a:r>
@@ -6996,7 +7374,7 @@
                 <a:solidFill>
                   <a:srgbClr val="202A33"/>
                 </a:solidFill>
-                <a:latin typeface="Noto Sans CJK JP"/>
+                <a:latin typeface="BIZ UDPGothic"/>
               </a:rPr>
               <a:t>静穏と会話の境界を示す</a:t>
             </a:r>
@@ -7065,7 +7443,7 @@
                 <a:solidFill>
                   <a:srgbClr val="202A33"/>
                 </a:solidFill>
-                <a:latin typeface="Noto Sans CJK JP"/>
+                <a:latin typeface="BIZ UDPGothic"/>
               </a:rPr>
               <a:t>書架・通路を移行帯にする</a:t>
             </a:r>
@@ -7134,7 +7512,7 @@
                 <a:solidFill>
                   <a:srgbClr val="202A33"/>
                 </a:solidFill>
-                <a:latin typeface="Noto Sans CJK JP"/>
+                <a:latin typeface="BIZ UDPGothic"/>
               </a:rPr>
               <a:t>案内表示</a:t>
             </a:r>
@@ -7203,7 +7581,7 @@
                 <a:solidFill>
                   <a:srgbClr val="202A33"/>
                 </a:solidFill>
-                <a:latin typeface="Noto Sans CJK JP"/>
+                <a:latin typeface="BIZ UDPGothic"/>
               </a:rPr>
               <a:t>各ゾーンの音のルール</a:t>
             </a:r>
@@ -7272,7 +7650,7 @@
                 <a:solidFill>
                   <a:srgbClr val="202A33"/>
                 </a:solidFill>
-                <a:latin typeface="Noto Sans CJK JP"/>
+                <a:latin typeface="BIZ UDPGothic"/>
               </a:rPr>
               <a:t>入口で利用目的別に案内</a:t>
             </a:r>
@@ -7341,7 +7719,7 @@
                 <a:solidFill>
                   <a:srgbClr val="202A33"/>
                 </a:solidFill>
-                <a:latin typeface="Noto Sans CJK JP"/>
+                <a:latin typeface="BIZ UDPGothic"/>
               </a:rPr>
               <a:t>検証したい点</a:t>
             </a:r>
@@ -7410,7 +7788,7 @@
                 <a:solidFill>
                   <a:srgbClr val="202A33"/>
                 </a:solidFill>
-                <a:latin typeface="Noto Sans CJK JP"/>
+                <a:latin typeface="BIZ UDPGothic"/>
               </a:rPr>
               <a:t>ルールの分かりやすさ</a:t>
             </a:r>
@@ -7479,7 +7857,7 @@
                 <a:solidFill>
                   <a:srgbClr val="202A33"/>
                 </a:solidFill>
-                <a:latin typeface="Noto Sans CJK JP"/>
+                <a:latin typeface="BIZ UDPGothic"/>
               </a:rPr>
               <a:t>移動と音の受け止め方</a:t>
             </a:r>
@@ -7652,7 +8030,7 @@
                 <a:solidFill>
                   <a:srgbClr val="5D6B78"/>
                 </a:solidFill>
-                <a:latin typeface="Noto Sans CJK JP"/>
+                <a:latin typeface="BIZ UDPGothic"/>
               </a:rPr>
               <a:t>静けさを選べる図書館</a:t>
             </a:r>
@@ -7686,7 +8064,7 @@
                 <a:solidFill>
                   <a:srgbClr val="5D6B78"/>
                 </a:solidFill>
-                <a:latin typeface="Noto Sans CJK JP"/>
+                <a:latin typeface="BIZ UDPGothic"/>
               </a:rPr>
               <a:t>調査方法</a:t>
             </a:r>
@@ -7720,7 +8098,7 @@
                 <a:solidFill>
                   <a:srgbClr val="0B3A5B"/>
                 </a:solidFill>
-                <a:latin typeface="Noto Sans CJK JP"/>
+                <a:latin typeface="BIZ UDPGothic"/>
               </a:rPr>
               <a:t>試行と観察の順序</a:t>
             </a:r>
@@ -7754,7 +8132,7 @@
                 <a:solidFill>
                   <a:srgbClr val="202A33"/>
                 </a:solidFill>
-                <a:latin typeface="Noto Sans CJK JP"/>
+                <a:latin typeface="BIZ UDPGothic"/>
               </a:rPr>
               <a:t>現状を観察し、小さく試し、同じ項目で再び観察する。</a:t>
             </a:r>
@@ -7788,7 +8166,7 @@
                 <a:solidFill>
                   <a:srgbClr val="FFFFFF"/>
                 </a:solidFill>
-                <a:latin typeface="Noto Sans CJK JP"/>
+                <a:latin typeface="BIZ UDPGothic"/>
               </a:rPr>
               <a:t>架空の研究提案・未実施　／　効果を示す実測値はありません</a:t>
             </a:r>
@@ -7822,7 +8200,7 @@
                 <a:solidFill>
                   <a:srgbClr val="FFFFFF"/>
                 </a:solidFill>
-                <a:latin typeface="Noto Sans CJK JP"/>
+                <a:latin typeface="BIZ UDPGothic"/>
               </a:rPr>
               <a:t>06</a:t>
             </a:r>
@@ -7856,7 +8234,7 @@
                 <a:solidFill>
                   <a:srgbClr val="5D6B78"/>
                 </a:solidFill>
-                <a:latin typeface="Noto Sans CJK JP"/>
+                <a:latin typeface="BIZ UDPGothic"/>
               </a:rPr>
               <a:t>読図：順序は研究計画。試行前に施設の許可と倫理面の確認を行う。日程は未設定。</a:t>
             </a:r>
@@ -7890,7 +8268,7 @@
                 <a:solidFill>
                   <a:srgbClr val="347B7F"/>
                 </a:solidFill>
-                <a:latin typeface="Noto Sans CJK JP"/>
+                <a:latin typeface="BIZ UDPGothic"/>
               </a:rPr>
               <a:t>01</a:t>
             </a:r>
@@ -7924,7 +8302,7 @@
                 <a:solidFill>
                   <a:srgbClr val="0B3A5B"/>
                 </a:solidFill>
-                <a:latin typeface="Noto Sans CJK JP"/>
+                <a:latin typeface="BIZ UDPGothic"/>
               </a:rPr>
               <a:t>現状把握</a:t>
             </a:r>
@@ -7958,7 +8336,7 @@
                 <a:solidFill>
                   <a:srgbClr val="202A33"/>
                 </a:solidFill>
-                <a:latin typeface="Noto Sans CJK JP"/>
+                <a:latin typeface="BIZ UDPGothic"/>
               </a:rPr>
               <a:t>利用目的と席の選択</a:t>
             </a:r>
@@ -7969,7 +8347,7 @@
                 <a:solidFill>
                   <a:srgbClr val="202A33"/>
                 </a:solidFill>
-                <a:latin typeface="Noto Sans CJK JP"/>
+                <a:latin typeface="BIZ UDPGothic"/>
               </a:rPr>
               <a:t>音への困りごと</a:t>
             </a:r>
@@ -8003,7 +8381,7 @@
                 <a:solidFill>
                   <a:srgbClr val="347B7F"/>
                 </a:solidFill>
-                <a:latin typeface="Noto Sans CJK JP"/>
+                <a:latin typeface="BIZ UDPGothic"/>
               </a:rPr>
               <a:t>02</a:t>
             </a:r>
@@ -8037,7 +8415,7 @@
                 <a:solidFill>
                   <a:srgbClr val="0B3A5B"/>
                 </a:solidFill>
-                <a:latin typeface="Noto Sans CJK JP"/>
+                <a:latin typeface="BIZ UDPGothic"/>
               </a:rPr>
               <a:t>案の試行</a:t>
             </a:r>
@@ -8071,7 +8449,7 @@
                 <a:solidFill>
                   <a:srgbClr val="202A33"/>
                 </a:solidFill>
-                <a:latin typeface="Noto Sans CJK JP"/>
+                <a:latin typeface="BIZ UDPGothic"/>
               </a:rPr>
               <a:t>配置と表示を仮設</a:t>
             </a:r>
@@ -8082,7 +8460,7 @@
                 <a:solidFill>
                   <a:srgbClr val="202A33"/>
                 </a:solidFill>
-                <a:latin typeface="Noto Sans CJK JP"/>
+                <a:latin typeface="BIZ UDPGothic"/>
               </a:rPr>
               <a:t>条件変更を記録</a:t>
             </a:r>
@@ -8116,7 +8494,7 @@
                 <a:solidFill>
                   <a:srgbClr val="347B7F"/>
                 </a:solidFill>
-                <a:latin typeface="Noto Sans CJK JP"/>
+                <a:latin typeface="BIZ UDPGothic"/>
               </a:rPr>
               <a:t>03</a:t>
             </a:r>
@@ -8150,7 +8528,7 @@
                 <a:solidFill>
                   <a:srgbClr val="0B3A5B"/>
                 </a:solidFill>
-                <a:latin typeface="Noto Sans CJK JP"/>
+                <a:latin typeface="BIZ UDPGothic"/>
               </a:rPr>
               <a:t>再観察</a:t>
             </a:r>
@@ -8184,7 +8562,7 @@
                 <a:solidFill>
                   <a:srgbClr val="202A33"/>
                 </a:solidFill>
-                <a:latin typeface="Noto Sans CJK JP"/>
+                <a:latin typeface="BIZ UDPGothic"/>
               </a:rPr>
               <a:t>同じ項目を観察</a:t>
             </a:r>
@@ -8195,7 +8573,7 @@
                 <a:solidFill>
                   <a:srgbClr val="202A33"/>
                 </a:solidFill>
-                <a:latin typeface="Noto Sans CJK JP"/>
+                <a:latin typeface="BIZ UDPGothic"/>
               </a:rPr>
               <a:t>利用者の評価を確認</a:t>
             </a:r>
@@ -8229,7 +8607,7 @@
                 <a:solidFill>
                   <a:srgbClr val="347B7F"/>
                 </a:solidFill>
-                <a:latin typeface="Noto Sans CJK JP"/>
+                <a:latin typeface="BIZ UDPGothic"/>
               </a:rPr>
               <a:t>04</a:t>
             </a:r>
@@ -8263,7 +8641,7 @@
                 <a:solidFill>
                   <a:srgbClr val="0B3A5B"/>
                 </a:solidFill>
-                <a:latin typeface="Noto Sans CJK JP"/>
+                <a:latin typeface="BIZ UDPGothic"/>
               </a:rPr>
               <a:t>比較・修正</a:t>
             </a:r>
@@ -8297,7 +8675,7 @@
                 <a:solidFill>
                   <a:srgbClr val="202A33"/>
                 </a:solidFill>
-                <a:latin typeface="Noto Sans CJK JP"/>
+                <a:latin typeface="BIZ UDPGothic"/>
               </a:rPr>
               <a:t>混雑などの違いを確認</a:t>
             </a:r>
@@ -8308,7 +8686,7 @@
                 <a:solidFill>
                   <a:srgbClr val="202A33"/>
                 </a:solidFill>
-                <a:latin typeface="Noto Sans CJK JP"/>
+                <a:latin typeface="BIZ UDPGothic"/>
               </a:rPr>
               <a:t>案の修正点を整理</a:t>
             </a:r>
@@ -8481,7 +8859,7 @@
                 <a:solidFill>
                   <a:srgbClr val="5D6B78"/>
                 </a:solidFill>
-                <a:latin typeface="Noto Sans CJK JP"/>
+                <a:latin typeface="BIZ UDPGothic"/>
               </a:rPr>
               <a:t>静けさを選べる図書館</a:t>
             </a:r>
@@ -8515,7 +8893,7 @@
                 <a:solidFill>
                   <a:srgbClr val="5D6B78"/>
                 </a:solidFill>
-                <a:latin typeface="Noto Sans CJK JP"/>
+                <a:latin typeface="BIZ UDPGothic"/>
               </a:rPr>
               <a:t>評価設計</a:t>
             </a:r>
@@ -8549,7 +8927,7 @@
                 <a:solidFill>
                   <a:srgbClr val="0B3A5B"/>
                 </a:solidFill>
-                <a:latin typeface="Noto Sans CJK JP"/>
+                <a:latin typeface="BIZ UDPGothic"/>
               </a:rPr>
               <a:t>評価項目と判断の条件</a:t>
             </a:r>
@@ -8583,7 +8961,7 @@
                 <a:solidFill>
                   <a:srgbClr val="202A33"/>
                 </a:solidFill>
-                <a:latin typeface="Noto Sans CJK JP"/>
+                <a:latin typeface="BIZ UDPGothic"/>
               </a:rPr>
               <a:t>席を選べることと、必要な活動を続けられることを評価する。</a:t>
             </a:r>
@@ -8617,7 +8995,7 @@
                 <a:solidFill>
                   <a:srgbClr val="FFFFFF"/>
                 </a:solidFill>
-                <a:latin typeface="Noto Sans CJK JP"/>
+                <a:latin typeface="BIZ UDPGothic"/>
               </a:rPr>
               <a:t>架空の研究提案・未実施　／　効果を示す実測値はありません</a:t>
             </a:r>
@@ -8651,7 +9029,7 @@
                 <a:solidFill>
                   <a:srgbClr val="FFFFFF"/>
                 </a:solidFill>
-                <a:latin typeface="Noto Sans CJK JP"/>
+                <a:latin typeface="BIZ UDPGothic"/>
               </a:rPr>
               <a:t>07</a:t>
             </a:r>
@@ -8685,7 +9063,7 @@
                 <a:solidFill>
                   <a:srgbClr val="5D6B78"/>
                 </a:solidFill>
-                <a:latin typeface="Noto Sans CJK JP"/>
+                <a:latin typeface="BIZ UDPGothic"/>
               </a:rPr>
               <a:t>読表：評価項目と取得方法の対応。採否の基準値は事前に定め、調査後に都合よく変えない。</a:t>
             </a:r>
@@ -8719,7 +9097,7 @@
                 <a:solidFill>
                   <a:srgbClr val="0B3A5B"/>
                 </a:solidFill>
-                <a:latin typeface="Noto Sans CJK JP"/>
+                <a:latin typeface="BIZ UDPGothic"/>
               </a:rPr>
               <a:t>席の選びやすさ</a:t>
             </a:r>
@@ -8753,7 +9131,7 @@
                 <a:solidFill>
                   <a:srgbClr val="202A33"/>
                 </a:solidFill>
-                <a:latin typeface="Noto Sans CJK JP"/>
+                <a:latin typeface="BIZ UDPGothic"/>
               </a:rPr>
               <a:t>利用者への任意の短い質問</a:t>
             </a:r>
@@ -8822,7 +9200,7 @@
                 <a:solidFill>
                   <a:srgbClr val="0B3A5B"/>
                 </a:solidFill>
-                <a:latin typeface="Noto Sans CJK JP"/>
+                <a:latin typeface="BIZ UDPGothic"/>
               </a:rPr>
               <a:t>集中・会話のしやすさ</a:t>
             </a:r>
@@ -8856,7 +9234,7 @@
                 <a:solidFill>
                   <a:srgbClr val="202A33"/>
                 </a:solidFill>
-                <a:latin typeface="Noto Sans CJK JP"/>
+                <a:latin typeface="BIZ UDPGothic"/>
               </a:rPr>
               <a:t>利用目的と合わせた自己評価</a:t>
             </a:r>
@@ -8925,7 +9303,7 @@
                 <a:solidFill>
                   <a:srgbClr val="0B3A5B"/>
                 </a:solidFill>
-                <a:latin typeface="Noto Sans CJK JP"/>
+                <a:latin typeface="BIZ UDPGothic"/>
               </a:rPr>
               <a:t>席の移動・混雑</a:t>
             </a:r>
@@ -8959,7 +9337,7 @@
                 <a:solidFill>
                   <a:srgbClr val="202A33"/>
                 </a:solidFill>
-                <a:latin typeface="Noto Sans CJK JP"/>
+                <a:latin typeface="BIZ UDPGothic"/>
               </a:rPr>
               <a:t>個人を特定しない観察記録</a:t>
             </a:r>
@@ -9028,7 +9406,7 @@
                 <a:solidFill>
                   <a:srgbClr val="0B3A5B"/>
                 </a:solidFill>
-                <a:latin typeface="Noto Sans CJK JP"/>
+                <a:latin typeface="BIZ UDPGothic"/>
               </a:rPr>
               <a:t>音環境の状態</a:t>
             </a:r>
@@ -9062,7 +9440,7 @@
                 <a:solidFill>
                   <a:srgbClr val="202A33"/>
                 </a:solidFill>
-                <a:latin typeface="Noto Sans CJK JP"/>
+                <a:latin typeface="BIZ UDPGothic"/>
               </a:rPr>
               <a:t>許可を得た測定と条件記録</a:t>
             </a:r>
@@ -9235,7 +9613,7 @@
                 <a:solidFill>
                   <a:srgbClr val="5D6B78"/>
                 </a:solidFill>
-                <a:latin typeface="Noto Sans CJK JP"/>
+                <a:latin typeface="BIZ UDPGothic"/>
               </a:rPr>
               <a:t>静けさを選べる図書館</a:t>
             </a:r>
@@ -9269,7 +9647,7 @@
                 <a:solidFill>
                   <a:srgbClr val="5D6B78"/>
                 </a:solidFill>
-                <a:latin typeface="Noto Sans CJK JP"/>
+                <a:latin typeface="BIZ UDPGothic"/>
               </a:rPr>
               <a:t>実施の条件</a:t>
             </a:r>
@@ -9303,7 +9681,7 @@
                 <a:solidFill>
                   <a:srgbClr val="0B3A5B"/>
                 </a:solidFill>
-                <a:latin typeface="Noto Sans CJK JP"/>
+                <a:latin typeface="BIZ UDPGothic"/>
               </a:rPr>
               <a:t>実施前に確認すること</a:t>
             </a:r>
@@ -9337,7 +9715,7 @@
                 <a:solidFill>
                   <a:srgbClr val="202A33"/>
                 </a:solidFill>
-                <a:latin typeface="Noto Sans CJK JP"/>
+                <a:latin typeface="BIZ UDPGothic"/>
               </a:rPr>
               <a:t>運用とプライバシーを確認してから、試行の範囲を決める。</a:t>
             </a:r>
@@ -9371,7 +9749,7 @@
                 <a:solidFill>
                   <a:srgbClr val="FFFFFF"/>
                 </a:solidFill>
-                <a:latin typeface="Noto Sans CJK JP"/>
+                <a:latin typeface="BIZ UDPGothic"/>
               </a:rPr>
               <a:t>架空の研究提案・未実施　／　効果を示す実測値はありません</a:t>
             </a:r>
@@ -9405,7 +9783,7 @@
                 <a:solidFill>
                   <a:srgbClr val="FFFFFF"/>
                 </a:solidFill>
-                <a:latin typeface="Noto Sans CJK JP"/>
+                <a:latin typeface="BIZ UDPGothic"/>
               </a:rPr>
               <a:t>08</a:t>
             </a:r>
@@ -9439,7 +9817,7 @@
                 <a:solidFill>
                   <a:srgbClr val="5D6B78"/>
                 </a:solidFill>
-                <a:latin typeface="Noto Sans CJK JP"/>
+                <a:latin typeface="BIZ UDPGothic"/>
               </a:rPr>
               <a:t>提案の位置づけ：設計と評価の計画。効果、利用者の支持、実施可否はまだ確認していない。</a:t>
             </a:r>
@@ -9473,9 +9851,9 @@
                 <a:solidFill>
                   <a:srgbClr val="0B3A5B"/>
                 </a:solidFill>
-                <a:latin typeface="Noto Sans CJK JP"/>
-              </a:rPr>
-              <a:t>静かな席も、</a:t>
+                <a:latin typeface="BIZ UDPGothic"/>
+              </a:rPr>
+              <a:t>運用と記録の条件を</a:t>
             </a:r>
           </a:p>
           <a:p>
@@ -9484,9 +9862,9 @@
                 <a:solidFill>
                   <a:srgbClr val="0B3A5B"/>
                 </a:solidFill>
-                <a:latin typeface="Noto Sans CJK JP"/>
-              </a:rPr>
-              <a:t>話せる場所も。</a:t>
+                <a:latin typeface="BIZ UDPGothic"/>
+              </a:rPr>
+              <a:t>先に確認する</a:t>
             </a:r>
           </a:p>
         </p:txBody>
@@ -9518,7 +9896,7 @@
                 <a:solidFill>
                   <a:srgbClr val="347B7F"/>
                 </a:solidFill>
-                <a:latin typeface="Noto Sans CJK JP"/>
+                <a:latin typeface="BIZ UDPGothic"/>
               </a:rPr>
               <a:t>施設との合意</a:t>
             </a:r>
@@ -9552,7 +9930,7 @@
                 <a:solidFill>
                   <a:srgbClr val="202A33"/>
                 </a:solidFill>
-                <a:latin typeface="Noto Sans CJK JP"/>
+                <a:latin typeface="BIZ UDPGothic"/>
               </a:rPr>
               <a:t>避難・動線・運用への影響</a:t>
             </a:r>
@@ -9586,7 +9964,7 @@
                 <a:solidFill>
                   <a:srgbClr val="347B7F"/>
                 </a:solidFill>
-                <a:latin typeface="Noto Sans CJK JP"/>
+                <a:latin typeface="BIZ UDPGothic"/>
               </a:rPr>
               <a:t>参加者への説明</a:t>
             </a:r>
@@ -9620,7 +9998,7 @@
                 <a:solidFill>
                   <a:srgbClr val="202A33"/>
                 </a:solidFill>
-                <a:latin typeface="Noto Sans CJK JP"/>
+                <a:latin typeface="BIZ UDPGothic"/>
               </a:rPr>
               <a:t>任意参加、同意、断る自由</a:t>
             </a:r>
@@ -9654,7 +10032,7 @@
                 <a:solidFill>
                   <a:srgbClr val="347B7F"/>
                 </a:solidFill>
-                <a:latin typeface="Noto Sans CJK JP"/>
+                <a:latin typeface="BIZ UDPGothic"/>
               </a:rPr>
               <a:t>記録の取り扱い</a:t>
             </a:r>
@@ -9688,7 +10066,7 @@
                 <a:solidFill>
                   <a:srgbClr val="202A33"/>
                 </a:solidFill>
-                <a:latin typeface="Noto Sans CJK JP"/>
+                <a:latin typeface="BIZ UDPGothic"/>
               </a:rPr>
               <a:t>識別情報を集めない方針</a:t>
             </a:r>
